--- a/ESE AI(Byte Minds)/ESE AI(Byte Minds) PPT.pptx
+++ b/ESE AI(Byte Minds)/ESE AI(Byte Minds) PPT.pptx
@@ -2644,25 +2644,8 @@
                 <a:latin typeface="Times New Roman" panose="02020603050405020304" pitchFamily="18" charset="0"/>
                 <a:cs typeface="Times New Roman" panose="02020603050405020304" pitchFamily="18" charset="0"/>
               </a:rPr>
-              <a:t>Mrs. Komal </a:t>
-            </a:r>
-            <a:r>
-              <a:rPr lang="en-IN" sz="2160" dirty="0" err="1">
-                <a:solidFill>
-                  <a:srgbClr val="FF0000"/>
-                </a:solidFill>
-                <a:latin typeface="Times New Roman" panose="02020603050405020304" pitchFamily="18" charset="0"/>
-                <a:cs typeface="Times New Roman" panose="02020603050405020304" pitchFamily="18" charset="0"/>
-              </a:rPr>
-              <a:t>Salgotra</a:t>
-            </a:r>
-            <a:endParaRPr lang="en-IN" sz="2160" dirty="0">
-              <a:solidFill>
-                <a:srgbClr val="FF0000"/>
-              </a:solidFill>
-              <a:latin typeface="Times New Roman" panose="02020603050405020304" pitchFamily="18" charset="0"/>
-              <a:cs typeface="Times New Roman" panose="02020603050405020304" pitchFamily="18" charset="0"/>
-            </a:endParaRPr>
+              <a:t>Mrs. Komal Salgotra</a:t>
+            </a:r>
           </a:p>
           <a:p>
             <a:pPr algn="just" defTabSz="822960">
@@ -3143,48 +3126,6 @@
           </a:p>
         </p:txBody>
       </p:sp>
-      <p:sp>
-        <p:nvSpPr>
-          <p:cNvPr id="5" name="Text 2"/>
-          <p:cNvSpPr/>
-          <p:nvPr/>
-        </p:nvSpPr>
-        <p:spPr>
-          <a:xfrm>
-            <a:off x="793790" y="5484138"/>
-            <a:ext cx="7556421" cy="362903"/>
-          </a:xfrm>
-          <a:prstGeom prst="rect">
-            <a:avLst/>
-          </a:prstGeom>
-          <a:noFill/>
-          <a:ln/>
-        </p:spPr>
-        <p:txBody>
-          <a:bodyPr wrap="none" lIns="0" tIns="0" rIns="0" bIns="0" rtlCol="0" anchor="t"/>
-          <a:lstStyle/>
-          <a:p>
-            <a:pPr marL="0" indent="0" algn="l">
-              <a:lnSpc>
-                <a:spcPts val="2850"/>
-              </a:lnSpc>
-              <a:buNone/>
-            </a:pPr>
-            <a:r>
-              <a:rPr lang="en-US" sz="1750" dirty="0">
-                <a:solidFill>
-                  <a:srgbClr val="272525"/>
-                </a:solidFill>
-                <a:latin typeface="Inter" pitchFamily="34" charset="0"/>
-                <a:ea typeface="Inter" pitchFamily="34" charset="-122"/>
-                <a:cs typeface="Inter" pitchFamily="34" charset="-120"/>
-              </a:rPr>
-              <a:t>Presented by [Your Name], [Your Affiliation/Title].</a:t>
-            </a:r>
-            <a:endParaRPr lang="en-US" sz="1750" dirty="0"/>
-          </a:p>
-        </p:txBody>
-      </p:sp>
     </p:spTree>
   </p:cSld>
   <p:clrMapOvr>
@@ -3899,7 +3840,7 @@
         </p:nvSpPr>
         <p:spPr>
           <a:xfrm>
-            <a:off x="793790" y="4574024"/>
+            <a:off x="793790" y="4298989"/>
             <a:ext cx="2845594" cy="1088708"/>
           </a:xfrm>
           <a:prstGeom prst="rect">
